--- a/présentation/Bloc_03_Projet_Walmart_Sales.pptx
+++ b/présentation/Bloc_03_Projet_Walmart_Sales.pptx
@@ -6,7 +6,7 @@
     <p:sldMasterId id="2147483660" r:id="rId2"/>
   </p:sldMasterIdLst>
   <p:notesMasterIdLst>
-    <p:notesMasterId r:id="rId10"/>
+    <p:notesMasterId r:id="rId11"/>
   </p:notesMasterIdLst>
   <p:sldIdLst>
     <p:sldId id="256" r:id="rId3"/>
@@ -14,25 +14,26 @@
     <p:sldId id="272" r:id="rId5"/>
     <p:sldId id="273" r:id="rId6"/>
     <p:sldId id="274" r:id="rId7"/>
-    <p:sldId id="275" r:id="rId8"/>
-    <p:sldId id="271" r:id="rId9"/>
+    <p:sldId id="276" r:id="rId8"/>
+    <p:sldId id="275" r:id="rId9"/>
+    <p:sldId id="271" r:id="rId10"/>
   </p:sldIdLst>
   <p:sldSz cx="9144000" cy="5143500" type="screen16x9"/>
   <p:notesSz cx="6858000" cy="9144000"/>
   <p:embeddedFontLst>
     <p:embeddedFont>
       <p:font typeface="Inter Medium" panose="020B0604020202020204" charset="0"/>
-      <p:regular r:id="rId11"/>
-      <p:bold r:id="rId12"/>
-      <p:italic r:id="rId13"/>
-      <p:boldItalic r:id="rId14"/>
+      <p:regular r:id="rId12"/>
+      <p:bold r:id="rId13"/>
+      <p:italic r:id="rId14"/>
+      <p:boldItalic r:id="rId15"/>
     </p:embeddedFont>
     <p:embeddedFont>
       <p:font typeface="Inter SemiBold" panose="020B0604020202020204" charset="0"/>
-      <p:regular r:id="rId15"/>
-      <p:bold r:id="rId16"/>
-      <p:italic r:id="rId17"/>
-      <p:boldItalic r:id="rId18"/>
+      <p:regular r:id="rId16"/>
+      <p:bold r:id="rId17"/>
+      <p:italic r:id="rId18"/>
+      <p:boldItalic r:id="rId19"/>
     </p:embeddedFont>
   </p:embeddedFontLst>
   <p:defaultTextStyle>
@@ -275,7 +276,7 @@
 <file path=ppt/revisionInfo.xml><?xml version="1.0" encoding="utf-8"?>
 <p1510:revInfo xmlns:a="http://schemas.openxmlformats.org/drawingml/2006/main" xmlns:r="http://schemas.openxmlformats.org/officeDocument/2006/relationships" xmlns:p1510="http://schemas.microsoft.com/office/powerpoint/2015/10/main">
   <p1510:revLst>
-    <p1510:client id="{0D0BB760-0C4E-462A-AC49-5F72D8585396}" v="95" dt="2026-02-02T16:12:43.178"/>
+    <p1510:client id="{0D0BB760-0C4E-462A-AC49-5F72D8585396}" v="101" dt="2026-02-11T17:02:34.956"/>
   </p1510:revLst>
 </p1510:revInfo>
 </file>
@@ -285,7 +286,7 @@
   <pc:docChgLst>
     <pc:chgData name="Jean-Yves Vuillequez" userId="e7fac481abea6bd0" providerId="LiveId" clId="{79E365E8-22BC-4EC2-9606-9A9AC6CD1D22}"/>
     <pc:docChg chg="undo custSel addSld delSld modSld addMainMaster delMainMaster">
-      <pc:chgData name="Jean-Yves Vuillequez" userId="e7fac481abea6bd0" providerId="LiveId" clId="{79E365E8-22BC-4EC2-9606-9A9AC6CD1D22}" dt="2026-02-02T17:16:08.171" v="2059" actId="1076"/>
+      <pc:chgData name="Jean-Yves Vuillequez" userId="e7fac481abea6bd0" providerId="LiveId" clId="{79E365E8-22BC-4EC2-9606-9A9AC6CD1D22}" dt="2026-02-11T17:02:55.722" v="2275" actId="20577"/>
       <pc:docMkLst>
         <pc:docMk/>
       </pc:docMkLst>
@@ -364,38 +365,6 @@
             <pc:docMk/>
             <pc:sldMk cId="0" sldId="258"/>
             <ac:spMk id="11" creationId="{ACF1FAB6-8357-78A4-A151-F4B6A024E6A7}"/>
-          </ac:spMkLst>
-        </pc:spChg>
-        <pc:spChg chg="add mod">
-          <ac:chgData name="Jean-Yves Vuillequez" userId="e7fac481abea6bd0" providerId="LiveId" clId="{79E365E8-22BC-4EC2-9606-9A9AC6CD1D22}" dt="2026-02-02T16:10:57.694" v="1963" actId="20577"/>
-          <ac:spMkLst>
-            <pc:docMk/>
-            <pc:sldMk cId="0" sldId="258"/>
-            <ac:spMk id="12" creationId="{FC491CDF-3F34-BB39-0A82-0DAC007BD132}"/>
-          </ac:spMkLst>
-        </pc:spChg>
-        <pc:spChg chg="add mod">
-          <ac:chgData name="Jean-Yves Vuillequez" userId="e7fac481abea6bd0" providerId="LiveId" clId="{79E365E8-22BC-4EC2-9606-9A9AC6CD1D22}" dt="2026-02-02T16:11:21.731" v="1980" actId="403"/>
-          <ac:spMkLst>
-            <pc:docMk/>
-            <pc:sldMk cId="0" sldId="258"/>
-            <ac:spMk id="13" creationId="{ACF1FAB6-8357-78A4-A151-F4B6A024E6A7}"/>
-          </ac:spMkLst>
-        </pc:spChg>
-        <pc:spChg chg="add mod">
-          <ac:chgData name="Jean-Yves Vuillequez" userId="e7fac481abea6bd0" providerId="LiveId" clId="{79E365E8-22BC-4EC2-9606-9A9AC6CD1D22}" dt="2026-02-02T16:10:49.645" v="1961" actId="20577"/>
-          <ac:spMkLst>
-            <pc:docMk/>
-            <pc:sldMk cId="0" sldId="258"/>
-            <ac:spMk id="14" creationId="{08A772C8-4897-AF7E-F054-AC3177F094BA}"/>
-          </ac:spMkLst>
-        </pc:spChg>
-        <pc:spChg chg="add mod">
-          <ac:chgData name="Jean-Yves Vuillequez" userId="e7fac481abea6bd0" providerId="LiveId" clId="{79E365E8-22BC-4EC2-9606-9A9AC6CD1D22}" dt="2026-02-02T16:12:16.030" v="2006" actId="1038"/>
-          <ac:spMkLst>
-            <pc:docMk/>
-            <pc:sldMk cId="0" sldId="258"/>
-            <ac:spMk id="15" creationId="{FA098B4A-1246-37C3-6B4B-35E8AB31E9C9}"/>
           </ac:spMkLst>
         </pc:spChg>
         <pc:spChg chg="mod">
@@ -478,22 +447,6 @@
             <ac:grpSpMk id="9" creationId="{E2A99614-8874-B199-82B5-05C2082C22CF}"/>
           </ac:grpSpMkLst>
         </pc:grpChg>
-        <pc:grpChg chg="add del mod ord">
-          <ac:chgData name="Jean-Yves Vuillequez" userId="e7fac481abea6bd0" providerId="LiveId" clId="{79E365E8-22BC-4EC2-9606-9A9AC6CD1D22}" dt="2026-02-02T16:12:42.667" v="2007" actId="478"/>
-          <ac:grpSpMkLst>
-            <pc:docMk/>
-            <pc:sldMk cId="0" sldId="258"/>
-            <ac:grpSpMk id="84" creationId="{E2A99614-8874-B199-82B5-05C2082C22CF}"/>
-          </ac:grpSpMkLst>
-        </pc:grpChg>
-        <pc:cxnChg chg="add mod">
-          <ac:chgData name="Jean-Yves Vuillequez" userId="e7fac481abea6bd0" providerId="LiveId" clId="{79E365E8-22BC-4EC2-9606-9A9AC6CD1D22}" dt="2026-02-02T16:12:42.667" v="2007" actId="478"/>
-          <ac:cxnSpMkLst>
-            <pc:docMk/>
-            <pc:sldMk cId="0" sldId="258"/>
-            <ac:cxnSpMk id="17" creationId="{E7C378F0-540F-EE8C-5E65-A2634082EA39}"/>
-          </ac:cxnSpMkLst>
-        </pc:cxnChg>
         <pc:cxnChg chg="mod">
           <ac:chgData name="Jean-Yves Vuillequez" userId="e7fac481abea6bd0" providerId="LiveId" clId="{79E365E8-22BC-4EC2-9606-9A9AC6CD1D22}" dt="2026-02-02T16:12:43.178" v="2008"/>
           <ac:cxnSpMkLst>
@@ -516,22 +469,6 @@
             <pc:docMk/>
             <pc:sldMk cId="0" sldId="258"/>
             <ac:cxnSpMk id="21" creationId="{2ED16C50-1AF6-F13B-C817-6FE324309705}"/>
-          </ac:cxnSpMkLst>
-        </pc:cxnChg>
-        <pc:cxnChg chg="add mod">
-          <ac:chgData name="Jean-Yves Vuillequez" userId="e7fac481abea6bd0" providerId="LiveId" clId="{79E365E8-22BC-4EC2-9606-9A9AC6CD1D22}" dt="2026-02-02T16:12:42.667" v="2007" actId="478"/>
-          <ac:cxnSpMkLst>
-            <pc:docMk/>
-            <pc:sldMk cId="0" sldId="258"/>
-            <ac:cxnSpMk id="33" creationId="{D2131AD7-8C86-1B7B-D274-91FF7C6CFAD4}"/>
-          </ac:cxnSpMkLst>
-        </pc:cxnChg>
-        <pc:cxnChg chg="add mod">
-          <ac:chgData name="Jean-Yves Vuillequez" userId="e7fac481abea6bd0" providerId="LiveId" clId="{79E365E8-22BC-4EC2-9606-9A9AC6CD1D22}" dt="2026-02-02T16:12:42.667" v="2007" actId="478"/>
-          <ac:cxnSpMkLst>
-            <pc:docMk/>
-            <pc:sldMk cId="0" sldId="258"/>
-            <ac:cxnSpMk id="40" creationId="{2ED16C50-1AF6-F13B-C817-6FE324309705}"/>
           </ac:cxnSpMkLst>
         </pc:cxnChg>
       </pc:sldChg>
@@ -661,7 +598,7 @@
         </pc:spChg>
       </pc:sldChg>
       <pc:sldChg chg="addSp delSp modSp add mod">
-        <pc:chgData name="Jean-Yves Vuillequez" userId="e7fac481abea6bd0" providerId="LiveId" clId="{79E365E8-22BC-4EC2-9606-9A9AC6CD1D22}" dt="2026-02-01T11:01:35.151" v="1896" actId="1076"/>
+        <pc:chgData name="Jean-Yves Vuillequez" userId="e7fac481abea6bd0" providerId="LiveId" clId="{79E365E8-22BC-4EC2-9606-9A9AC6CD1D22}" dt="2026-02-11T16:52:09.591" v="2100" actId="20577"/>
         <pc:sldMkLst>
           <pc:docMk/>
           <pc:sldMk cId="2166643445" sldId="274"/>
@@ -675,7 +612,7 @@
           </ac:spMkLst>
         </pc:spChg>
         <pc:spChg chg="add mod">
-          <ac:chgData name="Jean-Yves Vuillequez" userId="e7fac481abea6bd0" providerId="LiveId" clId="{79E365E8-22BC-4EC2-9606-9A9AC6CD1D22}" dt="2026-02-01T11:01:35.151" v="1896" actId="1076"/>
+          <ac:chgData name="Jean-Yves Vuillequez" userId="e7fac481abea6bd0" providerId="LiveId" clId="{79E365E8-22BC-4EC2-9606-9A9AC6CD1D22}" dt="2026-02-11T16:44:46.483" v="2061" actId="20577"/>
           <ac:spMkLst>
             <pc:docMk/>
             <pc:sldMk cId="2166643445" sldId="274"/>
@@ -683,7 +620,7 @@
           </ac:spMkLst>
         </pc:spChg>
         <pc:spChg chg="mod">
-          <ac:chgData name="Jean-Yves Vuillequez" userId="e7fac481abea6bd0" providerId="LiveId" clId="{79E365E8-22BC-4EC2-9606-9A9AC6CD1D22}" dt="2026-02-01T11:01:06.503" v="1888" actId="403"/>
+          <ac:chgData name="Jean-Yves Vuillequez" userId="e7fac481abea6bd0" providerId="LiveId" clId="{79E365E8-22BC-4EC2-9606-9A9AC6CD1D22}" dt="2026-02-11T16:52:09.591" v="2100" actId="20577"/>
           <ac:spMkLst>
             <pc:docMk/>
             <pc:sldMk cId="2166643445" sldId="274"/>
@@ -708,7 +645,7 @@
         </pc:graphicFrameChg>
       </pc:sldChg>
       <pc:sldChg chg="addSp delSp modSp add mod">
-        <pc:chgData name="Jean-Yves Vuillequez" userId="e7fac481abea6bd0" providerId="LiveId" clId="{79E365E8-22BC-4EC2-9606-9A9AC6CD1D22}" dt="2026-02-02T16:34:56.202" v="2009" actId="20577"/>
+        <pc:chgData name="Jean-Yves Vuillequez" userId="e7fac481abea6bd0" providerId="LiveId" clId="{79E365E8-22BC-4EC2-9606-9A9AC6CD1D22}" dt="2026-02-11T16:46:59.305" v="2065" actId="20577"/>
         <pc:sldMkLst>
           <pc:docMk/>
           <pc:sldMk cId="2509208219" sldId="275"/>
@@ -730,7 +667,7 @@
           </ac:spMkLst>
         </pc:spChg>
         <pc:spChg chg="add mod">
-          <ac:chgData name="Jean-Yves Vuillequez" userId="e7fac481abea6bd0" providerId="LiveId" clId="{79E365E8-22BC-4EC2-9606-9A9AC6CD1D22}" dt="2026-02-02T16:34:56.202" v="2009" actId="20577"/>
+          <ac:chgData name="Jean-Yves Vuillequez" userId="e7fac481abea6bd0" providerId="LiveId" clId="{79E365E8-22BC-4EC2-9606-9A9AC6CD1D22}" dt="2026-02-11T16:46:59.305" v="2065" actId="20577"/>
           <ac:spMkLst>
             <pc:docMk/>
             <pc:sldMk cId="2509208219" sldId="275"/>
@@ -745,6 +682,101 @@
             <ac:spMk id="68" creationId="{56021F2B-93DF-FD38-C57E-1902CCDF64EA}"/>
           </ac:spMkLst>
         </pc:spChg>
+      </pc:sldChg>
+      <pc:sldChg chg="addSp delSp modSp add mod">
+        <pc:chgData name="Jean-Yves Vuillequez" userId="e7fac481abea6bd0" providerId="LiveId" clId="{79E365E8-22BC-4EC2-9606-9A9AC6CD1D22}" dt="2026-02-11T17:02:55.722" v="2275" actId="20577"/>
+        <pc:sldMkLst>
+          <pc:docMk/>
+          <pc:sldMk cId="1380809690" sldId="276"/>
+        </pc:sldMkLst>
+        <pc:spChg chg="add mod">
+          <ac:chgData name="Jean-Yves Vuillequez" userId="e7fac481abea6bd0" providerId="LiveId" clId="{79E365E8-22BC-4EC2-9606-9A9AC6CD1D22}" dt="2026-02-11T17:02:55.722" v="2275" actId="20577"/>
+          <ac:spMkLst>
+            <pc:docMk/>
+            <pc:sldMk cId="1380809690" sldId="276"/>
+            <ac:spMk id="2" creationId="{6792D475-B02B-D53A-AFE7-6C948B7F5F2C}"/>
+          </ac:spMkLst>
+        </pc:spChg>
+        <pc:spChg chg="mod">
+          <ac:chgData name="Jean-Yves Vuillequez" userId="e7fac481abea6bd0" providerId="LiveId" clId="{79E365E8-22BC-4EC2-9606-9A9AC6CD1D22}" dt="2026-02-11T17:02:08.567" v="2248" actId="14100"/>
+          <ac:spMkLst>
+            <pc:docMk/>
+            <pc:sldMk cId="1380809690" sldId="276"/>
+            <ac:spMk id="3" creationId="{E6F1FA42-43FE-BD81-AC50-0F12AA82BB1C}"/>
+          </ac:spMkLst>
+        </pc:spChg>
+        <pc:spChg chg="mod">
+          <ac:chgData name="Jean-Yves Vuillequez" userId="e7fac481abea6bd0" providerId="LiveId" clId="{79E365E8-22BC-4EC2-9606-9A9AC6CD1D22}" dt="2026-02-11T17:02:36.280" v="2274" actId="113"/>
+          <ac:spMkLst>
+            <pc:docMk/>
+            <pc:sldMk cId="1380809690" sldId="276"/>
+            <ac:spMk id="4" creationId="{248A5A5E-33E6-0988-6455-9157D2792EF5}"/>
+          </ac:spMkLst>
+        </pc:spChg>
+        <pc:spChg chg="add">
+          <ac:chgData name="Jean-Yves Vuillequez" userId="e7fac481abea6bd0" providerId="LiveId" clId="{79E365E8-22BC-4EC2-9606-9A9AC6CD1D22}" dt="2026-02-11T17:02:32.738" v="2273"/>
+          <ac:spMkLst>
+            <pc:docMk/>
+            <pc:sldMk cId="1380809690" sldId="276"/>
+            <ac:spMk id="14" creationId="{CC623A62-D372-EEEB-5645-CC7C9172AAE6}"/>
+          </ac:spMkLst>
+        </pc:spChg>
+        <pc:spChg chg="del mod">
+          <ac:chgData name="Jean-Yves Vuillequez" userId="e7fac481abea6bd0" providerId="LiveId" clId="{79E365E8-22BC-4EC2-9606-9A9AC6CD1D22}" dt="2026-02-11T16:53:27.151" v="2112" actId="478"/>
+          <ac:spMkLst>
+            <pc:docMk/>
+            <pc:sldMk cId="1380809690" sldId="276"/>
+            <ac:spMk id="68" creationId="{78D8F2AF-CD14-708F-5FBC-4F21573B887B}"/>
+          </ac:spMkLst>
+        </pc:spChg>
+        <pc:picChg chg="add del mod">
+          <ac:chgData name="Jean-Yves Vuillequez" userId="e7fac481abea6bd0" providerId="LiveId" clId="{79E365E8-22BC-4EC2-9606-9A9AC6CD1D22}" dt="2026-02-11T16:55:32.165" v="2133" actId="478"/>
+          <ac:picMkLst>
+            <pc:docMk/>
+            <pc:sldMk cId="1380809690" sldId="276"/>
+            <ac:picMk id="6" creationId="{3730652A-BA42-6F5D-8908-36B3CA62D6CB}"/>
+          </ac:picMkLst>
+        </pc:picChg>
+        <pc:picChg chg="add mod">
+          <ac:chgData name="Jean-Yves Vuillequez" userId="e7fac481abea6bd0" providerId="LiveId" clId="{79E365E8-22BC-4EC2-9606-9A9AC6CD1D22}" dt="2026-02-11T16:55:45.862" v="2142" actId="14100"/>
+          <ac:picMkLst>
+            <pc:docMk/>
+            <pc:sldMk cId="1380809690" sldId="276"/>
+            <ac:picMk id="8" creationId="{074E0489-EF31-4548-8769-73A04D9A6CB4}"/>
+          </ac:picMkLst>
+        </pc:picChg>
+        <pc:picChg chg="del">
+          <ac:chgData name="Jean-Yves Vuillequez" userId="e7fac481abea6bd0" providerId="LiveId" clId="{79E365E8-22BC-4EC2-9606-9A9AC6CD1D22}" dt="2026-02-11T16:53:08.319" v="2102" actId="478"/>
+          <ac:picMkLst>
+            <pc:docMk/>
+            <pc:sldMk cId="1380809690" sldId="276"/>
+            <ac:picMk id="9" creationId="{0B5130EF-A834-DC25-E765-D69A400509CE}"/>
+          </ac:picMkLst>
+        </pc:picChg>
+        <pc:picChg chg="del">
+          <ac:chgData name="Jean-Yves Vuillequez" userId="e7fac481abea6bd0" providerId="LiveId" clId="{79E365E8-22BC-4EC2-9606-9A9AC6CD1D22}" dt="2026-02-11T16:53:08.319" v="2102" actId="478"/>
+          <ac:picMkLst>
+            <pc:docMk/>
+            <pc:sldMk cId="1380809690" sldId="276"/>
+            <ac:picMk id="11" creationId="{30D28A7C-EB7F-8D02-97E6-0A0C15BA826B}"/>
+          </ac:picMkLst>
+        </pc:picChg>
+        <pc:picChg chg="add mod">
+          <ac:chgData name="Jean-Yves Vuillequez" userId="e7fac481abea6bd0" providerId="LiveId" clId="{79E365E8-22BC-4EC2-9606-9A9AC6CD1D22}" dt="2026-02-11T16:56:53.066" v="2151" actId="108"/>
+          <ac:picMkLst>
+            <pc:docMk/>
+            <pc:sldMk cId="1380809690" sldId="276"/>
+            <ac:picMk id="12" creationId="{85FB858F-2B35-E16B-D8E2-72317F1117F6}"/>
+          </ac:picMkLst>
+        </pc:picChg>
+        <pc:picChg chg="del">
+          <ac:chgData name="Jean-Yves Vuillequez" userId="e7fac481abea6bd0" providerId="LiveId" clId="{79E365E8-22BC-4EC2-9606-9A9AC6CD1D22}" dt="2026-02-11T16:53:08.319" v="2102" actId="478"/>
+          <ac:picMkLst>
+            <pc:docMk/>
+            <pc:sldMk cId="1380809690" sldId="276"/>
+            <ac:picMk id="13" creationId="{7F779127-50E4-9389-776B-43FBCEE7B81F}"/>
+          </ac:picMkLst>
+        </pc:picChg>
       </pc:sldChg>
       <pc:sldMasterChg chg="add del addSldLayout delSldLayout">
         <pc:chgData name="Jean-Yves Vuillequez" userId="e7fac481abea6bd0" providerId="LiveId" clId="{79E365E8-22BC-4EC2-9606-9A9AC6CD1D22}" dt="2026-01-16T10:47:03.962" v="33" actId="47"/>
@@ -1884,6 +1916,133 @@
         <p:cNvPr id="1" name="Shape 64">
           <a:extLst>
             <a:ext uri="{FF2B5EF4-FFF2-40B4-BE49-F238E27FC236}">
+              <a16:creationId xmlns:a16="http://schemas.microsoft.com/office/drawing/2014/main" id="{37695D95-B66E-3C7A-A460-C5F11E977FF0}"/>
+            </a:ext>
+          </a:extLst>
+        </p:cNvPr>
+        <p:cNvGrpSpPr/>
+        <p:nvPr/>
+      </p:nvGrpSpPr>
+      <p:grpSpPr>
+        <a:xfrm>
+          <a:off x="0" y="0"/>
+          <a:ext cx="0" cy="0"/>
+          <a:chOff x="0" y="0"/>
+          <a:chExt cx="0" cy="0"/>
+        </a:xfrm>
+      </p:grpSpPr>
+      <p:sp>
+        <p:nvSpPr>
+          <p:cNvPr id="65" name="Google Shape;65;g3bc3b886ea_0_7:notes">
+            <a:extLst>
+              <a:ext uri="{FF2B5EF4-FFF2-40B4-BE49-F238E27FC236}">
+                <a16:creationId xmlns:a16="http://schemas.microsoft.com/office/drawing/2014/main" id="{E3F48BFA-5A7E-81F0-ADA3-854729A5A503}"/>
+              </a:ext>
+            </a:extLst>
+          </p:cNvPr>
+          <p:cNvSpPr>
+            <a:spLocks noGrp="1" noRot="1" noChangeAspect="1"/>
+          </p:cNvSpPr>
+          <p:nvPr>
+            <p:ph type="sldImg" idx="2"/>
+          </p:nvPr>
+        </p:nvSpPr>
+        <p:spPr>
+          <a:xfrm>
+            <a:off x="381000" y="685800"/>
+            <a:ext cx="6096000" cy="3429000"/>
+          </a:xfrm>
+          <a:custGeom>
+            <a:avLst/>
+            <a:gdLst/>
+            <a:ahLst/>
+            <a:cxnLst/>
+            <a:rect l="l" t="t" r="r" b="b"/>
+            <a:pathLst>
+              <a:path w="120000" h="120000" extrusionOk="0">
+                <a:moveTo>
+                  <a:pt x="0" y="0"/>
+                </a:moveTo>
+                <a:lnTo>
+                  <a:pt x="120000" y="0"/>
+                </a:lnTo>
+                <a:lnTo>
+                  <a:pt x="120000" y="120000"/>
+                </a:lnTo>
+                <a:lnTo>
+                  <a:pt x="0" y="120000"/>
+                </a:lnTo>
+                <a:close/>
+              </a:path>
+            </a:pathLst>
+          </a:custGeom>
+        </p:spPr>
+      </p:sp>
+      <p:sp>
+        <p:nvSpPr>
+          <p:cNvPr id="66" name="Google Shape;66;g3bc3b886ea_0_7:notes">
+            <a:extLst>
+              <a:ext uri="{FF2B5EF4-FFF2-40B4-BE49-F238E27FC236}">
+                <a16:creationId xmlns:a16="http://schemas.microsoft.com/office/drawing/2014/main" id="{169CDBEF-DF3E-7531-4CD5-1CAFD1CE17F1}"/>
+              </a:ext>
+            </a:extLst>
+          </p:cNvPr>
+          <p:cNvSpPr txBox="1">
+            <a:spLocks noGrp="1"/>
+          </p:cNvSpPr>
+          <p:nvPr>
+            <p:ph type="body" idx="1"/>
+          </p:nvPr>
+        </p:nvSpPr>
+        <p:spPr>
+          <a:xfrm>
+            <a:off x="685800" y="4343400"/>
+            <a:ext cx="5486400" cy="4114800"/>
+          </a:xfrm>
+          <a:prstGeom prst="rect">
+            <a:avLst/>
+          </a:prstGeom>
+        </p:spPr>
+        <p:txBody>
+          <a:bodyPr spcFirstLastPara="1" wrap="square" lIns="91425" tIns="91425" rIns="91425" bIns="91425" anchor="t" anchorCtr="0">
+            <a:noAutofit/>
+          </a:bodyPr>
+          <a:lstStyle/>
+          <a:p>
+            <a:pPr marL="0" lvl="0" indent="0" algn="l" rtl="0">
+              <a:spcBef>
+                <a:spcPts val="0"/>
+              </a:spcBef>
+              <a:spcAft>
+                <a:spcPts val="0"/>
+              </a:spcAft>
+              <a:buNone/>
+            </a:pPr>
+            <a:endParaRPr dirty="0"/>
+          </a:p>
+        </p:txBody>
+      </p:sp>
+    </p:spTree>
+    <p:extLst>
+      <p:ext uri="{BB962C8B-B14F-4D97-AF65-F5344CB8AC3E}">
+        <p14:creationId xmlns:p14="http://schemas.microsoft.com/office/powerpoint/2010/main" val="1394883517"/>
+      </p:ext>
+    </p:extLst>
+  </p:cSld>
+  <p:clrMapOvr>
+    <a:masterClrMapping/>
+  </p:clrMapOvr>
+</p:notes>
+</file>
+
+<file path=ppt/notesSlides/notesSlide7.xml><?xml version="1.0" encoding="utf-8"?>
+<p:notes xmlns:a="http://schemas.openxmlformats.org/drawingml/2006/main" xmlns:r="http://schemas.openxmlformats.org/officeDocument/2006/relationships" xmlns:p="http://schemas.openxmlformats.org/presentationml/2006/main" showMasterSp="0" showMasterPhAnim="0">
+  <p:cSld>
+    <p:spTree>
+      <p:nvGrpSpPr>
+        <p:cNvPr id="1" name="Shape 64">
+          <a:extLst>
+            <a:ext uri="{FF2B5EF4-FFF2-40B4-BE49-F238E27FC236}">
               <a16:creationId xmlns:a16="http://schemas.microsoft.com/office/drawing/2014/main" id="{49CD334E-186A-AA4B-3EED-5B83BA34D524}"/>
             </a:ext>
           </a:extLst>
@@ -2003,7 +2162,7 @@
 </p:notes>
 </file>
 
-<file path=ppt/notesSlides/notesSlide7.xml><?xml version="1.0" encoding="utf-8"?>
+<file path=ppt/notesSlides/notesSlide8.xml><?xml version="1.0" encoding="utf-8"?>
 <p:notes xmlns:a="http://schemas.openxmlformats.org/drawingml/2006/main" xmlns:r="http://schemas.openxmlformats.org/officeDocument/2006/relationships" xmlns:p="http://schemas.openxmlformats.org/presentationml/2006/main" showMasterSp="0" showMasterPhAnim="0">
   <p:cSld>
     <p:spTree>
@@ -18896,7 +19055,7 @@
                 <a:ea typeface="Inter SemiBold"/>
                 <a:sym typeface="Inter SemiBold"/>
               </a:rPr>
-              <a:t>Résultats et optimisations 1/2</a:t>
+              <a:t>Agrégation des résultats</a:t>
             </a:r>
             <a:br>
               <a:rPr lang="fr-FR" sz="2500" dirty="0">
@@ -20628,6 +20787,939 @@
         <p:cNvPr id="1" name="Shape 67">
           <a:extLst>
             <a:ext uri="{FF2B5EF4-FFF2-40B4-BE49-F238E27FC236}">
+              <a16:creationId xmlns:a16="http://schemas.microsoft.com/office/drawing/2014/main" id="{A9571DDF-BFDC-9304-1C62-B4C6BECDEE7B}"/>
+            </a:ext>
+          </a:extLst>
+        </p:cNvPr>
+        <p:cNvGrpSpPr/>
+        <p:nvPr/>
+      </p:nvGrpSpPr>
+      <p:grpSpPr>
+        <a:xfrm>
+          <a:off x="0" y="0"/>
+          <a:ext cx="0" cy="0"/>
+          <a:chOff x="0" y="0"/>
+          <a:chExt cx="0" cy="0"/>
+        </a:xfrm>
+      </p:grpSpPr>
+      <p:pic>
+        <p:nvPicPr>
+          <p:cNvPr id="75" name="Google Shape;75;p15">
+            <a:extLst>
+              <a:ext uri="{FF2B5EF4-FFF2-40B4-BE49-F238E27FC236}">
+                <a16:creationId xmlns:a16="http://schemas.microsoft.com/office/drawing/2014/main" id="{DB0D7CF6-AB19-364A-523B-7D3AAA7A84B6}"/>
+              </a:ext>
+            </a:extLst>
+          </p:cNvPr>
+          <p:cNvPicPr preferRelativeResize="0"/>
+          <p:nvPr/>
+        </p:nvPicPr>
+        <p:blipFill>
+          <a:blip r:embed="rId3">
+            <a:alphaModFix/>
+          </a:blip>
+          <a:stretch>
+            <a:fillRect/>
+          </a:stretch>
+        </p:blipFill>
+        <p:spPr>
+          <a:xfrm>
+            <a:off x="463375" y="482852"/>
+            <a:ext cx="576900" cy="385904"/>
+          </a:xfrm>
+          <a:prstGeom prst="rect">
+            <a:avLst/>
+          </a:prstGeom>
+          <a:noFill/>
+          <a:ln>
+            <a:noFill/>
+          </a:ln>
+        </p:spPr>
+      </p:pic>
+      <p:sp>
+        <p:nvSpPr>
+          <p:cNvPr id="76" name="Google Shape;76;p15">
+            <a:extLst>
+              <a:ext uri="{FF2B5EF4-FFF2-40B4-BE49-F238E27FC236}">
+                <a16:creationId xmlns:a16="http://schemas.microsoft.com/office/drawing/2014/main" id="{078E78EB-CCC4-1F4A-E975-3BD3006B9CE3}"/>
+              </a:ext>
+            </a:extLst>
+          </p:cNvPr>
+          <p:cNvSpPr/>
+          <p:nvPr/>
+        </p:nvSpPr>
+        <p:spPr>
+          <a:xfrm>
+            <a:off x="10225" y="4892025"/>
+            <a:ext cx="9144000" cy="251400"/>
+          </a:xfrm>
+          <a:prstGeom prst="rect">
+            <a:avLst/>
+          </a:prstGeom>
+          <a:solidFill>
+            <a:srgbClr val="C3FFFC"/>
+          </a:solidFill>
+          <a:ln>
+            <a:noFill/>
+          </a:ln>
+        </p:spPr>
+        <p:txBody>
+          <a:bodyPr spcFirstLastPara="1" wrap="square" lIns="91425" tIns="91425" rIns="91425" bIns="91425" anchor="ctr" anchorCtr="0">
+            <a:noAutofit/>
+          </a:bodyPr>
+          <a:lstStyle/>
+          <a:p>
+            <a:pPr marL="0" lvl="0" indent="0" algn="l" rtl="0">
+              <a:spcBef>
+                <a:spcPts val="0"/>
+              </a:spcBef>
+              <a:spcAft>
+                <a:spcPts val="0"/>
+              </a:spcAft>
+              <a:buNone/>
+            </a:pPr>
+            <a:endParaRPr dirty="0"/>
+          </a:p>
+        </p:txBody>
+      </p:sp>
+      <p:sp>
+        <p:nvSpPr>
+          <p:cNvPr id="3" name="Google Shape;69;p3">
+            <a:extLst>
+              <a:ext uri="{FF2B5EF4-FFF2-40B4-BE49-F238E27FC236}">
+                <a16:creationId xmlns:a16="http://schemas.microsoft.com/office/drawing/2014/main" id="{E6F1FA42-43FE-BD81-AC50-0F12AA82BB1C}"/>
+              </a:ext>
+            </a:extLst>
+          </p:cNvPr>
+          <p:cNvSpPr/>
+          <p:nvPr/>
+        </p:nvSpPr>
+        <p:spPr>
+          <a:xfrm>
+            <a:off x="311700" y="3848986"/>
+            <a:ext cx="8686385" cy="975386"/>
+          </a:xfrm>
+          <a:prstGeom prst="rect">
+            <a:avLst/>
+          </a:prstGeom>
+          <a:solidFill>
+            <a:schemeClr val="accent3">
+              <a:lumMod val="20000"/>
+              <a:lumOff val="80000"/>
+            </a:schemeClr>
+          </a:solidFill>
+          <a:ln>
+            <a:noFill/>
+          </a:ln>
+        </p:spPr>
+        <p:txBody>
+          <a:bodyPr spcFirstLastPara="1" wrap="square" lIns="91425" tIns="45700" rIns="91425" bIns="45700" anchor="ctr" anchorCtr="0">
+            <a:noAutofit/>
+          </a:bodyPr>
+          <a:lstStyle/>
+          <a:p>
+            <a:pPr marL="0" marR="0" lvl="0" indent="0" algn="ctr" rtl="0">
+              <a:lnSpc>
+                <a:spcPct val="100000"/>
+              </a:lnSpc>
+              <a:spcBef>
+                <a:spcPts val="0"/>
+              </a:spcBef>
+              <a:spcAft>
+                <a:spcPts val="0"/>
+              </a:spcAft>
+              <a:buClr>
+                <a:srgbClr val="000000"/>
+              </a:buClr>
+              <a:buSzPts val="1400"/>
+              <a:buFont typeface="Arial"/>
+              <a:buNone/>
+            </a:pPr>
+            <a:endParaRPr sz="1400" b="0" i="0" u="none" strike="noStrike" cap="none">
+              <a:solidFill>
+                <a:schemeClr val="lt1"/>
+              </a:solidFill>
+              <a:latin typeface="Arial"/>
+              <a:ea typeface="Arial"/>
+              <a:cs typeface="Arial"/>
+              <a:sym typeface="Arial"/>
+            </a:endParaRPr>
+          </a:p>
+        </p:txBody>
+      </p:sp>
+      <p:sp>
+        <p:nvSpPr>
+          <p:cNvPr id="4" name="Google Shape;73;p3">
+            <a:extLst>
+              <a:ext uri="{FF2B5EF4-FFF2-40B4-BE49-F238E27FC236}">
+                <a16:creationId xmlns:a16="http://schemas.microsoft.com/office/drawing/2014/main" id="{248A5A5E-33E6-0988-6455-9157D2792EF5}"/>
+              </a:ext>
+            </a:extLst>
+          </p:cNvPr>
+          <p:cNvSpPr txBox="1">
+            <a:spLocks/>
+          </p:cNvSpPr>
+          <p:nvPr/>
+        </p:nvSpPr>
+        <p:spPr>
+          <a:xfrm>
+            <a:off x="539752" y="3786263"/>
+            <a:ext cx="8458333" cy="814037"/>
+          </a:xfrm>
+          <a:prstGeom prst="rect">
+            <a:avLst/>
+          </a:prstGeom>
+          <a:noFill/>
+          <a:ln>
+            <a:noFill/>
+          </a:ln>
+        </p:spPr>
+        <p:txBody>
+          <a:bodyPr spcFirstLastPara="1" wrap="square" lIns="91425" tIns="91425" rIns="91425" bIns="91425" anchor="t" anchorCtr="0">
+            <a:noAutofit/>
+          </a:bodyPr>
+          <a:lstStyle>
+            <a:defPPr marR="0" lvl="0" algn="l" rtl="0">
+              <a:lnSpc>
+                <a:spcPct val="100000"/>
+              </a:lnSpc>
+              <a:spcBef>
+                <a:spcPts val="0"/>
+              </a:spcBef>
+              <a:spcAft>
+                <a:spcPts val="0"/>
+              </a:spcAft>
+            </a:defPPr>
+            <a:lvl1pPr marL="457200" marR="0" lvl="0" indent="-342900" algn="l" rtl="0">
+              <a:lnSpc>
+                <a:spcPct val="115000"/>
+              </a:lnSpc>
+              <a:spcBef>
+                <a:spcPts val="0"/>
+              </a:spcBef>
+              <a:spcAft>
+                <a:spcPts val="0"/>
+              </a:spcAft>
+              <a:buClr>
+                <a:schemeClr val="dk2"/>
+              </a:buClr>
+              <a:buSzPts val="1800"/>
+              <a:buFont typeface="Arial"/>
+              <a:buChar char="●"/>
+              <a:defRPr sz="1800" b="0" i="0" u="none" strike="noStrike" cap="none">
+                <a:solidFill>
+                  <a:schemeClr val="dk2"/>
+                </a:solidFill>
+                <a:latin typeface="Arial"/>
+                <a:ea typeface="Arial"/>
+                <a:cs typeface="Arial"/>
+                <a:sym typeface="Arial"/>
+              </a:defRPr>
+            </a:lvl1pPr>
+            <a:lvl2pPr marL="914400" marR="0" lvl="1" indent="-317500" algn="l" rtl="0">
+              <a:lnSpc>
+                <a:spcPct val="115000"/>
+              </a:lnSpc>
+              <a:spcBef>
+                <a:spcPts val="1600"/>
+              </a:spcBef>
+              <a:spcAft>
+                <a:spcPts val="0"/>
+              </a:spcAft>
+              <a:buClr>
+                <a:schemeClr val="dk2"/>
+              </a:buClr>
+              <a:buSzPts val="1400"/>
+              <a:buFont typeface="Arial"/>
+              <a:buChar char="○"/>
+              <a:defRPr sz="1400" b="0" i="0" u="none" strike="noStrike" cap="none">
+                <a:solidFill>
+                  <a:schemeClr val="dk2"/>
+                </a:solidFill>
+                <a:latin typeface="Arial"/>
+                <a:ea typeface="Arial"/>
+                <a:cs typeface="Arial"/>
+                <a:sym typeface="Arial"/>
+              </a:defRPr>
+            </a:lvl2pPr>
+            <a:lvl3pPr marL="1371600" marR="0" lvl="2" indent="-317500" algn="l" rtl="0">
+              <a:lnSpc>
+                <a:spcPct val="115000"/>
+              </a:lnSpc>
+              <a:spcBef>
+                <a:spcPts val="1600"/>
+              </a:spcBef>
+              <a:spcAft>
+                <a:spcPts val="0"/>
+              </a:spcAft>
+              <a:buClr>
+                <a:schemeClr val="dk2"/>
+              </a:buClr>
+              <a:buSzPts val="1400"/>
+              <a:buFont typeface="Arial"/>
+              <a:buChar char="■"/>
+              <a:defRPr sz="1400" b="0" i="0" u="none" strike="noStrike" cap="none">
+                <a:solidFill>
+                  <a:schemeClr val="dk2"/>
+                </a:solidFill>
+                <a:latin typeface="Arial"/>
+                <a:ea typeface="Arial"/>
+                <a:cs typeface="Arial"/>
+                <a:sym typeface="Arial"/>
+              </a:defRPr>
+            </a:lvl3pPr>
+            <a:lvl4pPr marL="1828800" marR="0" lvl="3" indent="-317500" algn="l" rtl="0">
+              <a:lnSpc>
+                <a:spcPct val="115000"/>
+              </a:lnSpc>
+              <a:spcBef>
+                <a:spcPts val="1600"/>
+              </a:spcBef>
+              <a:spcAft>
+                <a:spcPts val="0"/>
+              </a:spcAft>
+              <a:buClr>
+                <a:schemeClr val="dk2"/>
+              </a:buClr>
+              <a:buSzPts val="1400"/>
+              <a:buFont typeface="Arial"/>
+              <a:buChar char="●"/>
+              <a:defRPr sz="1400" b="0" i="0" u="none" strike="noStrike" cap="none">
+                <a:solidFill>
+                  <a:schemeClr val="dk2"/>
+                </a:solidFill>
+                <a:latin typeface="Arial"/>
+                <a:ea typeface="Arial"/>
+                <a:cs typeface="Arial"/>
+                <a:sym typeface="Arial"/>
+              </a:defRPr>
+            </a:lvl4pPr>
+            <a:lvl5pPr marL="2286000" marR="0" lvl="4" indent="-317500" algn="l" rtl="0">
+              <a:lnSpc>
+                <a:spcPct val="115000"/>
+              </a:lnSpc>
+              <a:spcBef>
+                <a:spcPts val="1600"/>
+              </a:spcBef>
+              <a:spcAft>
+                <a:spcPts val="0"/>
+              </a:spcAft>
+              <a:buClr>
+                <a:schemeClr val="dk2"/>
+              </a:buClr>
+              <a:buSzPts val="1400"/>
+              <a:buFont typeface="Arial"/>
+              <a:buChar char="○"/>
+              <a:defRPr sz="1400" b="0" i="0" u="none" strike="noStrike" cap="none">
+                <a:solidFill>
+                  <a:schemeClr val="dk2"/>
+                </a:solidFill>
+                <a:latin typeface="Arial"/>
+                <a:ea typeface="Arial"/>
+                <a:cs typeface="Arial"/>
+                <a:sym typeface="Arial"/>
+              </a:defRPr>
+            </a:lvl5pPr>
+            <a:lvl6pPr marL="2743200" marR="0" lvl="5" indent="-317500" algn="l" rtl="0">
+              <a:lnSpc>
+                <a:spcPct val="115000"/>
+              </a:lnSpc>
+              <a:spcBef>
+                <a:spcPts val="1600"/>
+              </a:spcBef>
+              <a:spcAft>
+                <a:spcPts val="0"/>
+              </a:spcAft>
+              <a:buClr>
+                <a:schemeClr val="dk2"/>
+              </a:buClr>
+              <a:buSzPts val="1400"/>
+              <a:buFont typeface="Arial"/>
+              <a:buChar char="■"/>
+              <a:defRPr sz="1400" b="0" i="0" u="none" strike="noStrike" cap="none">
+                <a:solidFill>
+                  <a:schemeClr val="dk2"/>
+                </a:solidFill>
+                <a:latin typeface="Arial"/>
+                <a:ea typeface="Arial"/>
+                <a:cs typeface="Arial"/>
+                <a:sym typeface="Arial"/>
+              </a:defRPr>
+            </a:lvl6pPr>
+            <a:lvl7pPr marL="3200400" marR="0" lvl="6" indent="-317500" algn="l" rtl="0">
+              <a:lnSpc>
+                <a:spcPct val="115000"/>
+              </a:lnSpc>
+              <a:spcBef>
+                <a:spcPts val="1600"/>
+              </a:spcBef>
+              <a:spcAft>
+                <a:spcPts val="0"/>
+              </a:spcAft>
+              <a:buClr>
+                <a:schemeClr val="dk2"/>
+              </a:buClr>
+              <a:buSzPts val="1400"/>
+              <a:buFont typeface="Arial"/>
+              <a:buChar char="●"/>
+              <a:defRPr sz="1400" b="0" i="0" u="none" strike="noStrike" cap="none">
+                <a:solidFill>
+                  <a:schemeClr val="dk2"/>
+                </a:solidFill>
+                <a:latin typeface="Arial"/>
+                <a:ea typeface="Arial"/>
+                <a:cs typeface="Arial"/>
+                <a:sym typeface="Arial"/>
+              </a:defRPr>
+            </a:lvl7pPr>
+            <a:lvl8pPr marL="3657600" marR="0" lvl="7" indent="-317500" algn="l" rtl="0">
+              <a:lnSpc>
+                <a:spcPct val="115000"/>
+              </a:lnSpc>
+              <a:spcBef>
+                <a:spcPts val="1600"/>
+              </a:spcBef>
+              <a:spcAft>
+                <a:spcPts val="0"/>
+              </a:spcAft>
+              <a:buClr>
+                <a:schemeClr val="dk2"/>
+              </a:buClr>
+              <a:buSzPts val="1400"/>
+              <a:buFont typeface="Arial"/>
+              <a:buChar char="○"/>
+              <a:defRPr sz="1400" b="0" i="0" u="none" strike="noStrike" cap="none">
+                <a:solidFill>
+                  <a:schemeClr val="dk2"/>
+                </a:solidFill>
+                <a:latin typeface="Arial"/>
+                <a:ea typeface="Arial"/>
+                <a:cs typeface="Arial"/>
+                <a:sym typeface="Arial"/>
+              </a:defRPr>
+            </a:lvl8pPr>
+            <a:lvl9pPr marL="4114800" marR="0" lvl="8" indent="-317500" algn="l" rtl="0">
+              <a:lnSpc>
+                <a:spcPct val="115000"/>
+              </a:lnSpc>
+              <a:spcBef>
+                <a:spcPts val="1600"/>
+              </a:spcBef>
+              <a:spcAft>
+                <a:spcPts val="1600"/>
+              </a:spcAft>
+              <a:buClr>
+                <a:schemeClr val="dk2"/>
+              </a:buClr>
+              <a:buSzPts val="1400"/>
+              <a:buFont typeface="Arial"/>
+              <a:buChar char="■"/>
+              <a:defRPr sz="1400" b="0" i="0" u="none" strike="noStrike" cap="none">
+                <a:solidFill>
+                  <a:schemeClr val="dk2"/>
+                </a:solidFill>
+                <a:latin typeface="Arial"/>
+                <a:ea typeface="Arial"/>
+                <a:cs typeface="Arial"/>
+                <a:sym typeface="Arial"/>
+              </a:defRPr>
+            </a:lvl9pPr>
+          </a:lstStyle>
+          <a:p>
+            <a:pPr>
+              <a:lnSpc>
+                <a:spcPct val="100000"/>
+              </a:lnSpc>
+              <a:spcBef>
+                <a:spcPts val="300"/>
+              </a:spcBef>
+              <a:buSzPct val="100000"/>
+            </a:pPr>
+            <a:r>
+              <a:rPr lang="fr-FR" sz="1000" b="1" dirty="0"/>
+              <a:t>Qualité de prédiction (test) :</a:t>
+            </a:r>
+            <a:r>
+              <a:rPr lang="fr-FR" sz="1000" dirty="0"/>
+              <a:t> les points sont globalement proches de la diagonale. Ridge généralise correctement et capture le niveau de ventes sur des semaines “standard”.</a:t>
+            </a:r>
+          </a:p>
+          <a:p>
+            <a:pPr>
+              <a:lnSpc>
+                <a:spcPct val="100000"/>
+              </a:lnSpc>
+              <a:spcBef>
+                <a:spcPts val="300"/>
+              </a:spcBef>
+              <a:buSzPct val="100000"/>
+            </a:pPr>
+            <a:r>
+              <a:rPr lang="fr-FR" sz="1000" b="1" dirty="0"/>
+              <a:t>Concentration des erreurs : </a:t>
+            </a:r>
+            <a:r>
+              <a:rPr lang="fr-FR" sz="1000" dirty="0"/>
+              <a:t>l’écart augmente sur les valeurs extrêmes ou des pics de ventes</a:t>
+            </a:r>
+          </a:p>
+          <a:p>
+            <a:pPr>
+              <a:lnSpc>
+                <a:spcPct val="100000"/>
+              </a:lnSpc>
+              <a:spcBef>
+                <a:spcPts val="300"/>
+              </a:spcBef>
+              <a:buSzPct val="100000"/>
+            </a:pPr>
+            <a:r>
+              <a:rPr lang="fr-FR" sz="1000" b="1" dirty="0"/>
+              <a:t>Principaux coefficients : </a:t>
+            </a:r>
+            <a:r>
+              <a:rPr lang="fr-FR" sz="1000" dirty="0"/>
+              <a:t>les effets Store dominent et ensuite des variables temporelles (Week/Quarter/</a:t>
+            </a:r>
+            <a:r>
+              <a:rPr lang="fr-FR" sz="1000" dirty="0" err="1"/>
+              <a:t>Month</a:t>
+            </a:r>
+            <a:r>
+              <a:rPr lang="fr-FR" sz="1000" dirty="0"/>
+              <a:t>). Cohérent avec la saisonnalité et l’hétérogénéité magasins</a:t>
+            </a:r>
+          </a:p>
+        </p:txBody>
+      </p:sp>
+      <p:sp>
+        <p:nvSpPr>
+          <p:cNvPr id="2" name="Google Shape;68;p15">
+            <a:extLst>
+              <a:ext uri="{FF2B5EF4-FFF2-40B4-BE49-F238E27FC236}">
+                <a16:creationId xmlns:a16="http://schemas.microsoft.com/office/drawing/2014/main" id="{6792D475-B02B-D53A-AFE7-6C948B7F5F2C}"/>
+              </a:ext>
+            </a:extLst>
+          </p:cNvPr>
+          <p:cNvSpPr txBox="1">
+            <a:spLocks/>
+          </p:cNvSpPr>
+          <p:nvPr/>
+        </p:nvSpPr>
+        <p:spPr>
+          <a:xfrm>
+            <a:off x="1192664" y="403309"/>
+            <a:ext cx="7602086" cy="533100"/>
+          </a:xfrm>
+          <a:prstGeom prst="rect">
+            <a:avLst/>
+          </a:prstGeom>
+          <a:noFill/>
+          <a:ln>
+            <a:noFill/>
+          </a:ln>
+        </p:spPr>
+        <p:txBody>
+          <a:bodyPr spcFirstLastPara="1" wrap="square" lIns="91425" tIns="91425" rIns="91425" bIns="91425" anchor="t" anchorCtr="0">
+            <a:noAutofit/>
+          </a:bodyPr>
+          <a:lstStyle>
+            <a:defPPr marR="0" lvl="0" algn="l" rtl="0">
+              <a:lnSpc>
+                <a:spcPct val="100000"/>
+              </a:lnSpc>
+              <a:spcBef>
+                <a:spcPts val="0"/>
+              </a:spcBef>
+              <a:spcAft>
+                <a:spcPts val="0"/>
+              </a:spcAft>
+            </a:defPPr>
+            <a:lvl1pPr marR="0" lvl="0" algn="l" rtl="0">
+              <a:lnSpc>
+                <a:spcPct val="100000"/>
+              </a:lnSpc>
+              <a:spcBef>
+                <a:spcPts val="0"/>
+              </a:spcBef>
+              <a:spcAft>
+                <a:spcPts val="0"/>
+              </a:spcAft>
+              <a:buClr>
+                <a:schemeClr val="dk1"/>
+              </a:buClr>
+              <a:buSzPts val="2800"/>
+              <a:buFont typeface="Arial"/>
+              <a:buNone/>
+              <a:defRPr sz="2800" b="0" i="0" u="none" strike="noStrike" cap="none">
+                <a:solidFill>
+                  <a:schemeClr val="dk1"/>
+                </a:solidFill>
+                <a:latin typeface="Arial"/>
+                <a:ea typeface="Arial"/>
+                <a:cs typeface="Arial"/>
+                <a:sym typeface="Arial"/>
+              </a:defRPr>
+            </a:lvl1pPr>
+            <a:lvl2pPr marR="0" lvl="1" algn="l" rtl="0">
+              <a:lnSpc>
+                <a:spcPct val="100000"/>
+              </a:lnSpc>
+              <a:spcBef>
+                <a:spcPts val="0"/>
+              </a:spcBef>
+              <a:spcAft>
+                <a:spcPts val="0"/>
+              </a:spcAft>
+              <a:buClr>
+                <a:schemeClr val="dk1"/>
+              </a:buClr>
+              <a:buSzPts val="2800"/>
+              <a:buFont typeface="Arial"/>
+              <a:buNone/>
+              <a:defRPr sz="2800" b="0" i="0" u="none" strike="noStrike" cap="none">
+                <a:solidFill>
+                  <a:schemeClr val="dk1"/>
+                </a:solidFill>
+                <a:latin typeface="Arial"/>
+                <a:ea typeface="Arial"/>
+                <a:cs typeface="Arial"/>
+                <a:sym typeface="Arial"/>
+              </a:defRPr>
+            </a:lvl2pPr>
+            <a:lvl3pPr marR="0" lvl="2" algn="l" rtl="0">
+              <a:lnSpc>
+                <a:spcPct val="100000"/>
+              </a:lnSpc>
+              <a:spcBef>
+                <a:spcPts val="0"/>
+              </a:spcBef>
+              <a:spcAft>
+                <a:spcPts val="0"/>
+              </a:spcAft>
+              <a:buClr>
+                <a:schemeClr val="dk1"/>
+              </a:buClr>
+              <a:buSzPts val="2800"/>
+              <a:buFont typeface="Arial"/>
+              <a:buNone/>
+              <a:defRPr sz="2800" b="0" i="0" u="none" strike="noStrike" cap="none">
+                <a:solidFill>
+                  <a:schemeClr val="dk1"/>
+                </a:solidFill>
+                <a:latin typeface="Arial"/>
+                <a:ea typeface="Arial"/>
+                <a:cs typeface="Arial"/>
+                <a:sym typeface="Arial"/>
+              </a:defRPr>
+            </a:lvl3pPr>
+            <a:lvl4pPr marR="0" lvl="3" algn="l" rtl="0">
+              <a:lnSpc>
+                <a:spcPct val="100000"/>
+              </a:lnSpc>
+              <a:spcBef>
+                <a:spcPts val="0"/>
+              </a:spcBef>
+              <a:spcAft>
+                <a:spcPts val="0"/>
+              </a:spcAft>
+              <a:buClr>
+                <a:schemeClr val="dk1"/>
+              </a:buClr>
+              <a:buSzPts val="2800"/>
+              <a:buFont typeface="Arial"/>
+              <a:buNone/>
+              <a:defRPr sz="2800" b="0" i="0" u="none" strike="noStrike" cap="none">
+                <a:solidFill>
+                  <a:schemeClr val="dk1"/>
+                </a:solidFill>
+                <a:latin typeface="Arial"/>
+                <a:ea typeface="Arial"/>
+                <a:cs typeface="Arial"/>
+                <a:sym typeface="Arial"/>
+              </a:defRPr>
+            </a:lvl4pPr>
+            <a:lvl5pPr marR="0" lvl="4" algn="l" rtl="0">
+              <a:lnSpc>
+                <a:spcPct val="100000"/>
+              </a:lnSpc>
+              <a:spcBef>
+                <a:spcPts val="0"/>
+              </a:spcBef>
+              <a:spcAft>
+                <a:spcPts val="0"/>
+              </a:spcAft>
+              <a:buClr>
+                <a:schemeClr val="dk1"/>
+              </a:buClr>
+              <a:buSzPts val="2800"/>
+              <a:buFont typeface="Arial"/>
+              <a:buNone/>
+              <a:defRPr sz="2800" b="0" i="0" u="none" strike="noStrike" cap="none">
+                <a:solidFill>
+                  <a:schemeClr val="dk1"/>
+                </a:solidFill>
+                <a:latin typeface="Arial"/>
+                <a:ea typeface="Arial"/>
+                <a:cs typeface="Arial"/>
+                <a:sym typeface="Arial"/>
+              </a:defRPr>
+            </a:lvl5pPr>
+            <a:lvl6pPr marR="0" lvl="5" algn="l" rtl="0">
+              <a:lnSpc>
+                <a:spcPct val="100000"/>
+              </a:lnSpc>
+              <a:spcBef>
+                <a:spcPts val="0"/>
+              </a:spcBef>
+              <a:spcAft>
+                <a:spcPts val="0"/>
+              </a:spcAft>
+              <a:buClr>
+                <a:schemeClr val="dk1"/>
+              </a:buClr>
+              <a:buSzPts val="2800"/>
+              <a:buFont typeface="Arial"/>
+              <a:buNone/>
+              <a:defRPr sz="2800" b="0" i="0" u="none" strike="noStrike" cap="none">
+                <a:solidFill>
+                  <a:schemeClr val="dk1"/>
+                </a:solidFill>
+                <a:latin typeface="Arial"/>
+                <a:ea typeface="Arial"/>
+                <a:cs typeface="Arial"/>
+                <a:sym typeface="Arial"/>
+              </a:defRPr>
+            </a:lvl6pPr>
+            <a:lvl7pPr marR="0" lvl="6" algn="l" rtl="0">
+              <a:lnSpc>
+                <a:spcPct val="100000"/>
+              </a:lnSpc>
+              <a:spcBef>
+                <a:spcPts val="0"/>
+              </a:spcBef>
+              <a:spcAft>
+                <a:spcPts val="0"/>
+              </a:spcAft>
+              <a:buClr>
+                <a:schemeClr val="dk1"/>
+              </a:buClr>
+              <a:buSzPts val="2800"/>
+              <a:buFont typeface="Arial"/>
+              <a:buNone/>
+              <a:defRPr sz="2800" b="0" i="0" u="none" strike="noStrike" cap="none">
+                <a:solidFill>
+                  <a:schemeClr val="dk1"/>
+                </a:solidFill>
+                <a:latin typeface="Arial"/>
+                <a:ea typeface="Arial"/>
+                <a:cs typeface="Arial"/>
+                <a:sym typeface="Arial"/>
+              </a:defRPr>
+            </a:lvl7pPr>
+            <a:lvl8pPr marR="0" lvl="7" algn="l" rtl="0">
+              <a:lnSpc>
+                <a:spcPct val="100000"/>
+              </a:lnSpc>
+              <a:spcBef>
+                <a:spcPts val="0"/>
+              </a:spcBef>
+              <a:spcAft>
+                <a:spcPts val="0"/>
+              </a:spcAft>
+              <a:buClr>
+                <a:schemeClr val="dk1"/>
+              </a:buClr>
+              <a:buSzPts val="2800"/>
+              <a:buFont typeface="Arial"/>
+              <a:buNone/>
+              <a:defRPr sz="2800" b="0" i="0" u="none" strike="noStrike" cap="none">
+                <a:solidFill>
+                  <a:schemeClr val="dk1"/>
+                </a:solidFill>
+                <a:latin typeface="Arial"/>
+                <a:ea typeface="Arial"/>
+                <a:cs typeface="Arial"/>
+                <a:sym typeface="Arial"/>
+              </a:defRPr>
+            </a:lvl8pPr>
+            <a:lvl9pPr marR="0" lvl="8" algn="l" rtl="0">
+              <a:lnSpc>
+                <a:spcPct val="100000"/>
+              </a:lnSpc>
+              <a:spcBef>
+                <a:spcPts val="0"/>
+              </a:spcBef>
+              <a:spcAft>
+                <a:spcPts val="0"/>
+              </a:spcAft>
+              <a:buClr>
+                <a:schemeClr val="dk1"/>
+              </a:buClr>
+              <a:buSzPts val="2800"/>
+              <a:buFont typeface="Arial"/>
+              <a:buNone/>
+              <a:defRPr sz="2800" b="0" i="0" u="none" strike="noStrike" cap="none">
+                <a:solidFill>
+                  <a:schemeClr val="dk1"/>
+                </a:solidFill>
+                <a:latin typeface="Arial"/>
+                <a:ea typeface="Arial"/>
+                <a:cs typeface="Arial"/>
+                <a:sym typeface="Arial"/>
+              </a:defRPr>
+            </a:lvl9pPr>
+          </a:lstStyle>
+          <a:p>
+            <a:r>
+              <a:rPr lang="fr-FR" sz="2500" dirty="0">
+                <a:solidFill>
+                  <a:srgbClr val="0E3449"/>
+                </a:solidFill>
+                <a:latin typeface="Inter SemiBold"/>
+                <a:ea typeface="Inter SemiBold"/>
+                <a:sym typeface="Inter SemiBold"/>
+              </a:rPr>
+              <a:t>Résultats et </a:t>
+            </a:r>
+            <a:r>
+              <a:rPr lang="fr-FR" sz="2500">
+                <a:solidFill>
+                  <a:srgbClr val="0E3449"/>
+                </a:solidFill>
+                <a:latin typeface="Inter SemiBold"/>
+                <a:ea typeface="Inter SemiBold"/>
+                <a:sym typeface="Inter SemiBold"/>
+              </a:rPr>
+              <a:t>optimisations 1/2</a:t>
+            </a:r>
+            <a:br>
+              <a:rPr lang="fr-FR" sz="2500" dirty="0">
+                <a:solidFill>
+                  <a:srgbClr val="0E3449"/>
+                </a:solidFill>
+                <a:latin typeface="Inter SemiBold"/>
+                <a:ea typeface="Inter SemiBold"/>
+                <a:sym typeface="Inter SemiBold"/>
+              </a:rPr>
+            </a:br>
+            <a:r>
+              <a:rPr lang="fr-FR" sz="1600" dirty="0">
+                <a:solidFill>
+                  <a:srgbClr val="0E3449"/>
+                </a:solidFill>
+                <a:latin typeface="Inter SemiBold"/>
+                <a:ea typeface="Inter SemiBold"/>
+                <a:sym typeface="Inter SemiBold"/>
+              </a:rPr>
+              <a:t>Focus Ridge</a:t>
+            </a:r>
+            <a:endParaRPr lang="fr-FR" sz="2500" dirty="0">
+              <a:solidFill>
+                <a:srgbClr val="0E3449"/>
+              </a:solidFill>
+              <a:latin typeface="Inter SemiBold"/>
+              <a:ea typeface="Inter SemiBold"/>
+              <a:sym typeface="Inter SemiBold"/>
+            </a:endParaRPr>
+          </a:p>
+        </p:txBody>
+      </p:sp>
+      <p:pic>
+        <p:nvPicPr>
+          <p:cNvPr id="8" name="Image 7" descr="Une image contenant ligne, Tracé, capture d’écran, diagramme&#10;&#10;Le contenu généré par l’IA peut être incorrect.">
+            <a:extLst>
+              <a:ext uri="{FF2B5EF4-FFF2-40B4-BE49-F238E27FC236}">
+                <a16:creationId xmlns:a16="http://schemas.microsoft.com/office/drawing/2014/main" id="{074E0489-EF31-4548-8769-73A04D9A6CB4}"/>
+              </a:ext>
+            </a:extLst>
+          </p:cNvPr>
+          <p:cNvPicPr>
+            <a:picLocks noChangeAspect="1"/>
+          </p:cNvPicPr>
+          <p:nvPr/>
+        </p:nvPicPr>
+        <p:blipFill>
+          <a:blip r:embed="rId4"/>
+          <a:stretch>
+            <a:fillRect/>
+          </a:stretch>
+        </p:blipFill>
+        <p:spPr>
+          <a:xfrm>
+            <a:off x="311700" y="1481745"/>
+            <a:ext cx="4153974" cy="2012793"/>
+          </a:xfrm>
+          <a:prstGeom prst="rect">
+            <a:avLst/>
+          </a:prstGeom>
+          <a:ln>
+            <a:solidFill>
+              <a:schemeClr val="bg1">
+                <a:lumMod val="85000"/>
+              </a:schemeClr>
+            </a:solidFill>
+          </a:ln>
+        </p:spPr>
+      </p:pic>
+      <p:pic>
+        <p:nvPicPr>
+          <p:cNvPr id="12" name="Image 11" descr="Une image contenant texte, capture d’écran, Police, ligne&#10;&#10;Le contenu généré par l’IA peut être incorrect.">
+            <a:extLst>
+              <a:ext uri="{FF2B5EF4-FFF2-40B4-BE49-F238E27FC236}">
+                <a16:creationId xmlns:a16="http://schemas.microsoft.com/office/drawing/2014/main" id="{85FB858F-2B35-E16B-D8E2-72317F1117F6}"/>
+              </a:ext>
+            </a:extLst>
+          </p:cNvPr>
+          <p:cNvPicPr>
+            <a:picLocks noChangeAspect="1"/>
+          </p:cNvPicPr>
+          <p:nvPr/>
+        </p:nvPicPr>
+        <p:blipFill>
+          <a:blip r:embed="rId5"/>
+          <a:stretch>
+            <a:fillRect/>
+          </a:stretch>
+        </p:blipFill>
+        <p:spPr>
+          <a:xfrm>
+            <a:off x="4761760" y="1481746"/>
+            <a:ext cx="4236325" cy="2012792"/>
+          </a:xfrm>
+          <a:prstGeom prst="rect">
+            <a:avLst/>
+          </a:prstGeom>
+          <a:ln>
+            <a:solidFill>
+              <a:schemeClr val="bg1">
+                <a:lumMod val="85000"/>
+              </a:schemeClr>
+            </a:solidFill>
+          </a:ln>
+        </p:spPr>
+      </p:pic>
+    </p:spTree>
+    <p:extLst>
+      <p:ext uri="{BB962C8B-B14F-4D97-AF65-F5344CB8AC3E}">
+        <p14:creationId xmlns:p14="http://schemas.microsoft.com/office/powerpoint/2010/main" val="1380809690"/>
+      </p:ext>
+    </p:extLst>
+  </p:cSld>
+  <p:clrMapOvr>
+    <a:masterClrMapping/>
+  </p:clrMapOvr>
+</p:sld>
+</file>
+
+<file path=ppt/slides/slide7.xml><?xml version="1.0" encoding="utf-8"?>
+<p:sld xmlns:a="http://schemas.openxmlformats.org/drawingml/2006/main" xmlns:r="http://schemas.openxmlformats.org/officeDocument/2006/relationships" xmlns:p="http://schemas.openxmlformats.org/presentationml/2006/main">
+  <p:cSld>
+    <p:spTree>
+      <p:nvGrpSpPr>
+        <p:cNvPr id="1" name="Shape 67">
+          <a:extLst>
+            <a:ext uri="{FF2B5EF4-FFF2-40B4-BE49-F238E27FC236}">
               <a16:creationId xmlns:a16="http://schemas.microsoft.com/office/drawing/2014/main" id="{B899E54F-3D72-A942-0CAC-3F8262FBF794}"/>
             </a:ext>
           </a:extLst>
@@ -21234,7 +22326,7 @@
             </a:r>
             <a:r>
               <a:rPr lang="fr-FR" sz="1200" dirty="0"/>
-              <a:t>Le RMSE test est en baisse (151 pour Ridge et 153k pour Lasso) et le R² test sur Ridge est positionné à 0.93. Le modèle plus stable et gagne en robustesse sur des données non vues.</a:t>
+              <a:t>Le RMSE test est en baisse (151 pour Ridge et 153k pour Lasso) et le R² test sur Ridge est positionné à 0.93. Le modèle est plus stable et gagne en robustesse sur des données non vues.</a:t>
             </a:r>
           </a:p>
           <a:p>
@@ -21293,7 +22385,7 @@
 </p:sld>
 </file>
 
-<file path=ppt/slides/slide7.xml><?xml version="1.0" encoding="utf-8"?>
+<file path=ppt/slides/slide8.xml><?xml version="1.0" encoding="utf-8"?>
 <p:sld xmlns:a="http://schemas.openxmlformats.org/drawingml/2006/main" xmlns:r="http://schemas.openxmlformats.org/officeDocument/2006/relationships" xmlns:p="http://schemas.openxmlformats.org/presentationml/2006/main">
   <p:cSld>
     <p:bg>
